--- a/assets/pptx/catalog-133.pptx
+++ b/assets/pptx/catalog-133.pptx
@@ -3301,7 +3301,7 @@
                 <a:ea typeface="Ebrima"/>
                 <a:cs typeface="Ebrima"/>
               </a:rPr>
-              <a:t>በደስታ በሃሴት ይሞላኛል (2)</a:t>
+              <a:t>በደስታ በሃሴት ይሞላኛል 2</a:t>
             </a:r>
           </a:p>
         </p:txBody>
@@ -3489,7 +3489,7 @@
                 <a:ea typeface="Ebrima"/>
                 <a:cs typeface="Ebrima"/>
               </a:rPr>
-              <a:t>ሂወት ይቀጥላል በታምር(4)</a:t>
+              <a:t>ሂወት ይቀጥላል በታምር4</a:t>
             </a:r>
           </a:p>
         </p:txBody>
@@ -3677,7 +3677,7 @@
                 <a:ea typeface="Ebrima"/>
                 <a:cs typeface="Ebrima"/>
               </a:rPr>
-              <a:t>ሂወት ይቀጥላል በታምር(4)</a:t>
+              <a:t>ሂወት ይቀጥላል በታምር4</a:t>
             </a:r>
           </a:p>
         </p:txBody>
@@ -3798,7 +3798,7 @@
                 <a:ea typeface="Ebrima"/>
                 <a:cs typeface="Ebrima"/>
               </a:rPr>
-              <a:t>በደስታ በሃሴት ይሞላኛል (2)</a:t>
+              <a:t>በደስታ በሃሴት ይሞላኛል 2</a:t>
             </a:r>
           </a:p>
         </p:txBody>
@@ -3865,7 +3865,7 @@
                 <a:ea typeface="Ebrima"/>
                 <a:cs typeface="Ebrima"/>
               </a:rPr>
-              <a:t>የምልህ ኣለኝ(4)</a:t>
+              <a:t>የምልህ ኣለኝ4</a:t>
             </a:r>
           </a:p>
           <a:p>
@@ -3883,7 +3883,7 @@
                 <a:ea typeface="Ebrima"/>
                 <a:cs typeface="Ebrima"/>
               </a:rPr>
-              <a:t>ተባረክ የኔ ጌታ ተመስገን የኔ ጌታ (2)</a:t>
+              <a:t>ተባረክ የኔ ጌታ ተመስገን የኔ ጌታ 2</a:t>
             </a:r>
           </a:p>
         </p:txBody>
